--- a/03-build/pptx/C4_U9_docente.pptx
+++ b/03-build/pptx/C4_U9_docente.pptx
@@ -4990,7 +4990,6 @@
               <a:srgbClr val="E4E3DE"/>
             </a:solidFill>
           </a:ln>
-          <a:effectLst/>
           <a:effectLst>
             <a:outerShdw blurRad="90000" dist="38000" dir="5400000" rotWithShape="0">
               <a:srgbClr val="20242E">
@@ -6407,7 +6406,6 @@
               <a:srgbClr val="D64550"/>
             </a:solidFill>
           </a:ln>
-          <a:effectLst/>
           <a:effectLst>
             <a:outerShdw blurRad="90000" dist="38000" dir="5400000" rotWithShape="0">
               <a:srgbClr val="20242E">
@@ -6595,7 +6593,6 @@
               <a:srgbClr val="E4E3DE"/>
             </a:solidFill>
           </a:ln>
-          <a:effectLst/>
           <a:effectLst>
             <a:outerShdw blurRad="90000" dist="38000" dir="5400000" rotWithShape="0">
               <a:srgbClr val="20242E">
@@ -7342,7 +7339,6 @@
               <a:srgbClr val="E4E3DE"/>
             </a:solidFill>
           </a:ln>
-          <a:effectLst/>
           <a:effectLst>
             <a:outerShdw blurRad="90000" dist="38000" dir="5400000" rotWithShape="0">
               <a:srgbClr val="20242E">
@@ -7486,7 +7482,6 @@
               <a:srgbClr val="E4E3DE"/>
             </a:solidFill>
           </a:ln>
-          <a:effectLst/>
           <a:effectLst>
             <a:outerShdw blurRad="90000" dist="38000" dir="5400000" rotWithShape="0">
               <a:srgbClr val="20242E">
@@ -7630,7 +7625,6 @@
               <a:srgbClr val="E4E3DE"/>
             </a:solidFill>
           </a:ln>
-          <a:effectLst/>
           <a:effectLst>
             <a:outerShdw blurRad="90000" dist="38000" dir="5400000" rotWithShape="0">
               <a:srgbClr val="20242E">
@@ -7774,7 +7768,6 @@
               <a:srgbClr val="E4E3DE"/>
             </a:solidFill>
           </a:ln>
-          <a:effectLst/>
           <a:effectLst>
             <a:outerShdw blurRad="90000" dist="38000" dir="5400000" rotWithShape="0">
               <a:srgbClr val="20242E">
@@ -7918,7 +7911,6 @@
               <a:srgbClr val="E4E3DE"/>
             </a:solidFill>
           </a:ln>
-          <a:effectLst/>
           <a:effectLst>
             <a:outerShdw blurRad="90000" dist="38000" dir="5400000" rotWithShape="0">
               <a:srgbClr val="20242E">
@@ -8062,7 +8054,6 @@
               <a:srgbClr val="E4E3DE"/>
             </a:solidFill>
           </a:ln>
-          <a:effectLst/>
           <a:effectLst>
             <a:outerShdw blurRad="90000" dist="38000" dir="5400000" rotWithShape="0">
               <a:srgbClr val="20242E">
@@ -8206,7 +8197,6 @@
               <a:srgbClr val="D64550"/>
             </a:solidFill>
           </a:ln>
-          <a:effectLst/>
           <a:effectLst>
             <a:outerShdw blurRad="90000" dist="38000" dir="5400000" rotWithShape="0">
               <a:srgbClr val="20242E">
@@ -8955,7 +8945,6 @@
               <a:srgbClr val="D64550"/>
             </a:solidFill>
           </a:ln>
-          <a:effectLst/>
           <a:effectLst>
             <a:outerShdw blurRad="90000" dist="38000" dir="5400000" rotWithShape="0">
               <a:srgbClr val="20242E">
@@ -10224,7 +10213,6 @@
               <a:srgbClr val="D64550"/>
             </a:solidFill>
           </a:ln>
-          <a:effectLst/>
           <a:effectLst>
             <a:outerShdw blurRad="90000" dist="38000" dir="5400000" rotWithShape="0">
               <a:srgbClr val="20242E">
@@ -10488,7 +10476,6 @@
               <a:srgbClr val="E4E3DE"/>
             </a:solidFill>
           </a:ln>
-          <a:effectLst/>
           <a:effectLst>
             <a:outerShdw blurRad="90000" dist="38000" dir="5400000" rotWithShape="0">
               <a:srgbClr val="20242E">
@@ -11191,7 +11178,6 @@
               <a:srgbClr val="E4E3DE"/>
             </a:solidFill>
           </a:ln>
-          <a:effectLst/>
           <a:effectLst>
             <a:outerShdw blurRad="90000" dist="38000" dir="5400000" rotWithShape="0">
               <a:srgbClr val="20242E">
@@ -11345,7 +11331,6 @@
               <a:srgbClr val="E4E3DE"/>
             </a:solidFill>
           </a:ln>
-          <a:effectLst/>
           <a:effectLst>
             <a:outerShdw blurRad="90000" dist="38000" dir="5400000" rotWithShape="0">
               <a:srgbClr val="20242E">
@@ -11499,7 +11484,6 @@
               <a:srgbClr val="E4E3DE"/>
             </a:solidFill>
           </a:ln>
-          <a:effectLst/>
           <a:effectLst>
             <a:outerShdw blurRad="90000" dist="38000" dir="5400000" rotWithShape="0">
               <a:srgbClr val="20242E">
@@ -11653,7 +11637,6 @@
               <a:srgbClr val="E4E3DE"/>
             </a:solidFill>
           </a:ln>
-          <a:effectLst/>
           <a:effectLst>
             <a:outerShdw blurRad="90000" dist="38000" dir="5400000" rotWithShape="0">
               <a:srgbClr val="20242E">
@@ -11807,7 +11790,6 @@
               <a:srgbClr val="E4E3DE"/>
             </a:solidFill>
           </a:ln>
-          <a:effectLst/>
           <a:effectLst>
             <a:outerShdw blurRad="90000" dist="38000" dir="5400000" rotWithShape="0">
               <a:srgbClr val="20242E">
@@ -11961,7 +11943,6 @@
               <a:srgbClr val="E4E3DE"/>
             </a:solidFill>
           </a:ln>
-          <a:effectLst/>
           <a:effectLst>
             <a:outerShdw blurRad="90000" dist="38000" dir="5400000" rotWithShape="0">
               <a:srgbClr val="20242E">
@@ -12115,7 +12096,6 @@
               <a:srgbClr val="E4E3DE"/>
             </a:solidFill>
           </a:ln>
-          <a:effectLst/>
           <a:effectLst>
             <a:outerShdw blurRad="90000" dist="38000" dir="5400000" rotWithShape="0">
               <a:srgbClr val="20242E">
@@ -12269,7 +12249,6 @@
               <a:srgbClr val="E4E3DE"/>
             </a:solidFill>
           </a:ln>
-          <a:effectLst/>
           <a:effectLst>
             <a:outerShdw blurRad="90000" dist="38000" dir="5400000" rotWithShape="0">
               <a:srgbClr val="20242E">
@@ -12423,7 +12402,6 @@
               <a:srgbClr val="E4E3DE"/>
             </a:solidFill>
           </a:ln>
-          <a:effectLst/>
           <a:effectLst>
             <a:outerShdw blurRad="90000" dist="38000" dir="5400000" rotWithShape="0">
               <a:srgbClr val="20242E">
@@ -12577,7 +12555,6 @@
               <a:srgbClr val="E4E3DE"/>
             </a:solidFill>
           </a:ln>
-          <a:effectLst/>
           <a:effectLst>
             <a:outerShdw blurRad="90000" dist="38000" dir="5400000" rotWithShape="0">
               <a:srgbClr val="20242E">
@@ -12731,7 +12708,6 @@
               <a:srgbClr val="E4E3DE"/>
             </a:solidFill>
           </a:ln>
-          <a:effectLst/>
           <a:effectLst>
             <a:outerShdw blurRad="90000" dist="38000" dir="5400000" rotWithShape="0">
               <a:srgbClr val="20242E">
@@ -12885,7 +12861,6 @@
               <a:srgbClr val="E4E3DE"/>
             </a:solidFill>
           </a:ln>
-          <a:effectLst/>
           <a:effectLst>
             <a:outerShdw blurRad="90000" dist="38000" dir="5400000" rotWithShape="0">
               <a:srgbClr val="20242E">
@@ -13039,7 +13014,6 @@
               <a:srgbClr val="E4E3DE"/>
             </a:solidFill>
           </a:ln>
-          <a:effectLst/>
           <a:effectLst>
             <a:outerShdw blurRad="90000" dist="38000" dir="5400000" rotWithShape="0">
               <a:srgbClr val="20242E">
@@ -13193,7 +13167,6 @@
               <a:srgbClr val="E4E3DE"/>
             </a:solidFill>
           </a:ln>
-          <a:effectLst/>
           <a:effectLst>
             <a:outerShdw blurRad="90000" dist="38000" dir="5400000" rotWithShape="0">
               <a:srgbClr val="20242E">
@@ -13347,7 +13320,6 @@
               <a:srgbClr val="E4E3DE"/>
             </a:solidFill>
           </a:ln>
-          <a:effectLst/>
           <a:effectLst>
             <a:outerShdw blurRad="90000" dist="38000" dir="5400000" rotWithShape="0">
               <a:srgbClr val="20242E">
@@ -13501,7 +13473,6 @@
               <a:srgbClr val="E4E3DE"/>
             </a:solidFill>
           </a:ln>
-          <a:effectLst/>
           <a:effectLst>
             <a:outerShdw blurRad="90000" dist="38000" dir="5400000" rotWithShape="0">
               <a:srgbClr val="20242E">
@@ -13655,7 +13626,6 @@
               <a:srgbClr val="E4E3DE"/>
             </a:solidFill>
           </a:ln>
-          <a:effectLst/>
           <a:effectLst>
             <a:outerShdw blurRad="90000" dist="38000" dir="5400000" rotWithShape="0">
               <a:srgbClr val="20242E">
@@ -13809,7 +13779,6 @@
               <a:srgbClr val="D64550"/>
             </a:solidFill>
           </a:ln>
-          <a:effectLst/>
           <a:effectLst>
             <a:outerShdw blurRad="90000" dist="38000" dir="5400000" rotWithShape="0">
               <a:srgbClr val="20242E">
@@ -13963,7 +13932,6 @@
               <a:srgbClr val="D64550"/>
             </a:solidFill>
           </a:ln>
-          <a:effectLst/>
           <a:effectLst>
             <a:outerShdw blurRad="90000" dist="38000" dir="5400000" rotWithShape="0">
               <a:srgbClr val="20242E">
@@ -14117,7 +14085,6 @@
               <a:srgbClr val="D64550"/>
             </a:solidFill>
           </a:ln>
-          <a:effectLst/>
           <a:effectLst>
             <a:outerShdw blurRad="90000" dist="38000" dir="5400000" rotWithShape="0">
               <a:srgbClr val="20242E">
@@ -14754,7 +14721,6 @@
               <a:srgbClr val="E4E3DE"/>
             </a:solidFill>
           </a:ln>
-          <a:effectLst/>
           <a:effectLst>
             <a:outerShdw blurRad="90000" dist="38000" dir="5400000" rotWithShape="0">
               <a:srgbClr val="20242E">
@@ -15052,7 +15018,6 @@
               <a:srgbClr val="DC2626"/>
             </a:solidFill>
           </a:ln>
-          <a:effectLst/>
           <a:effectLst>
             <a:outerShdw blurRad="90000" dist="38000" dir="5400000" rotWithShape="0">
               <a:srgbClr val="20242E">
@@ -15219,7 +15184,6 @@
               <a:srgbClr val="D64550"/>
             </a:solidFill>
           </a:ln>
-          <a:effectLst/>
           <a:effectLst>
             <a:outerShdw blurRad="90000" dist="38000" dir="5400000" rotWithShape="0">
               <a:srgbClr val="20242E">
@@ -16799,7 +16763,6 @@
               <a:srgbClr val="E4E3DE"/>
             </a:solidFill>
           </a:ln>
-          <a:effectLst/>
           <a:effectLst>
             <a:outerShdw blurRad="90000" dist="38000" dir="5400000" rotWithShape="0">
               <a:srgbClr val="20242E">
@@ -16968,7 +16931,6 @@
               <a:srgbClr val="E4E3DE"/>
             </a:solidFill>
           </a:ln>
-          <a:effectLst/>
           <a:effectLst>
             <a:outerShdw blurRad="90000" dist="38000" dir="5400000" rotWithShape="0">
               <a:srgbClr val="20242E">
@@ -17137,7 +17099,6 @@
               <a:srgbClr val="E4E3DE"/>
             </a:solidFill>
           </a:ln>
-          <a:effectLst/>
           <a:effectLst>
             <a:outerShdw blurRad="90000" dist="38000" dir="5400000" rotWithShape="0">
               <a:srgbClr val="20242E">
@@ -17306,7 +17267,6 @@
               <a:srgbClr val="E4E3DE"/>
             </a:solidFill>
           </a:ln>
-          <a:effectLst/>
           <a:effectLst>
             <a:outerShdw blurRad="90000" dist="38000" dir="5400000" rotWithShape="0">
               <a:srgbClr val="20242E">
@@ -17475,7 +17435,6 @@
               <a:srgbClr val="E4E3DE"/>
             </a:solidFill>
           </a:ln>
-          <a:effectLst/>
           <a:effectLst>
             <a:outerShdw blurRad="90000" dist="38000" dir="5400000" rotWithShape="0">
               <a:srgbClr val="20242E">
@@ -17644,7 +17603,6 @@
               <a:srgbClr val="E4E3DE"/>
             </a:solidFill>
           </a:ln>
-          <a:effectLst/>
           <a:effectLst>
             <a:outerShdw blurRad="90000" dist="38000" dir="5400000" rotWithShape="0">
               <a:srgbClr val="20242E">
@@ -17813,7 +17771,6 @@
               <a:srgbClr val="E4E3DE"/>
             </a:solidFill>
           </a:ln>
-          <a:effectLst/>
           <a:effectLst>
             <a:outerShdw blurRad="90000" dist="38000" dir="5400000" rotWithShape="0">
               <a:srgbClr val="20242E">
@@ -17982,7 +17939,6 @@
               <a:srgbClr val="E4E3DE"/>
             </a:solidFill>
           </a:ln>
-          <a:effectLst/>
           <a:effectLst>
             <a:outerShdw blurRad="90000" dist="38000" dir="5400000" rotWithShape="0">
               <a:srgbClr val="20242E">
@@ -18151,7 +18107,6 @@
               <a:srgbClr val="E4E3DE"/>
             </a:solidFill>
           </a:ln>
-          <a:effectLst/>
           <a:effectLst>
             <a:outerShdw blurRad="90000" dist="38000" dir="5400000" rotWithShape="0">
               <a:srgbClr val="20242E">
@@ -18320,7 +18275,6 @@
               <a:srgbClr val="E4E3DE"/>
             </a:solidFill>
           </a:ln>
-          <a:effectLst/>
           <a:effectLst>
             <a:outerShdw blurRad="90000" dist="38000" dir="5400000" rotWithShape="0">
               <a:srgbClr val="20242E">
@@ -19069,7 +19023,6 @@
               <a:srgbClr val="E4E3DE"/>
             </a:solidFill>
           </a:ln>
-          <a:effectLst/>
           <a:effectLst>
             <a:outerShdw blurRad="90000" dist="38000" dir="5400000" rotWithShape="0">
               <a:srgbClr val="20242E">
@@ -20924,7 +20877,6 @@
               <a:srgbClr val="D64550"/>
             </a:solidFill>
           </a:ln>
-          <a:effectLst/>
           <a:effectLst>
             <a:outerShdw blurRad="90000" dist="38000" dir="5400000" rotWithShape="0">
               <a:srgbClr val="20242E">
@@ -21752,7 +21704,6 @@
               <a:srgbClr val="E4E3DE"/>
             </a:solidFill>
           </a:ln>
-          <a:effectLst/>
           <a:effectLst>
             <a:outerShdw blurRad="90000" dist="38000" dir="5400000" rotWithShape="0">
               <a:srgbClr val="20242E">
@@ -22089,7 +22040,6 @@
               <a:srgbClr val="E4E3DE"/>
             </a:solidFill>
           </a:ln>
-          <a:effectLst/>
           <a:effectLst>
             <a:outerShdw blurRad="90000" dist="38000" dir="5400000" rotWithShape="0">
               <a:srgbClr val="20242E">
@@ -22408,7 +22358,6 @@
               <a:srgbClr val="D64550"/>
             </a:solidFill>
           </a:ln>
-          <a:effectLst/>
           <a:effectLst>
             <a:outerShdw blurRad="90000" dist="38000" dir="5400000" rotWithShape="0">
               <a:srgbClr val="20242E">
@@ -24207,7 +24156,6 @@
               <a:srgbClr val="A8323B"/>
             </a:solidFill>
           </a:ln>
-          <a:effectLst/>
           <a:effectLst>
             <a:outerShdw blurRad="90000" dist="38000" dir="5400000" rotWithShape="0">
               <a:srgbClr val="20242E">
@@ -24691,7 +24639,6 @@
               <a:srgbClr val="A8323B"/>
             </a:solidFill>
           </a:ln>
-          <a:effectLst/>
           <a:effectLst>
             <a:outerShdw blurRad="90000" dist="38000" dir="5400000" rotWithShape="0">
               <a:srgbClr val="20242E">
@@ -24787,7 +24734,6 @@
               <a:srgbClr val="D64550"/>
             </a:solidFill>
           </a:ln>
-          <a:effectLst/>
           <a:effectLst>
             <a:outerShdw blurRad="90000" dist="38000" dir="5400000" rotWithShape="0">
               <a:srgbClr val="20242E">
@@ -26190,7 +26136,6 @@
               <a:srgbClr val="E4E3DE"/>
             </a:solidFill>
           </a:ln>
-          <a:effectLst/>
           <a:effectLst>
             <a:outerShdw blurRad="90000" dist="38000" dir="5400000" rotWithShape="0">
               <a:srgbClr val="20242E">
@@ -26614,7 +26559,6 @@
               <a:srgbClr val="E4E3DE"/>
             </a:solidFill>
           </a:ln>
-          <a:effectLst/>
           <a:effectLst>
             <a:outerShdw blurRad="90000" dist="38000" dir="5400000" rotWithShape="0">
               <a:srgbClr val="20242E">
@@ -27038,7 +26982,6 @@
               <a:srgbClr val="E4E3DE"/>
             </a:solidFill>
           </a:ln>
-          <a:effectLst/>
           <a:effectLst>
             <a:outerShdw blurRad="90000" dist="38000" dir="5400000" rotWithShape="0">
               <a:srgbClr val="20242E">
@@ -27990,7 +27933,6 @@
               <a:srgbClr val="D64550"/>
             </a:solidFill>
           </a:ln>
-          <a:effectLst/>
           <a:effectLst>
             <a:outerShdw blurRad="90000" dist="38000" dir="5400000" rotWithShape="0">
               <a:srgbClr val="20242E">
@@ -28360,7 +28302,6 @@
               <a:srgbClr val="E4E3DE"/>
             </a:solidFill>
           </a:ln>
-          <a:effectLst/>
           <a:effectLst>
             <a:outerShdw blurRad="90000" dist="38000" dir="5400000" rotWithShape="0">
               <a:srgbClr val="20242E">
@@ -29812,7 +29753,6 @@
               <a:srgbClr val="E4E3DE"/>
             </a:solidFill>
           </a:ln>
-          <a:effectLst/>
           <a:effectLst>
             <a:outerShdw blurRad="90000" dist="38000" dir="5400000" rotWithShape="0">
               <a:srgbClr val="20242E">
@@ -30723,7 +30663,6 @@
               <a:srgbClr val="D64550"/>
             </a:solidFill>
           </a:ln>
-          <a:effectLst/>
           <a:effectLst>
             <a:outerShdw blurRad="90000" dist="38000" dir="5400000" rotWithShape="0">
               <a:srgbClr val="20242E">
@@ -31655,7 +31594,6 @@
               <a:srgbClr val="E4E3DE"/>
             </a:solidFill>
           </a:ln>
-          <a:effectLst/>
           <a:effectLst>
             <a:outerShdw blurRad="90000" dist="38000" dir="5400000" rotWithShape="0">
               <a:srgbClr val="20242E">
@@ -31944,7 +31882,6 @@
               <a:srgbClr val="E4E3DE"/>
             </a:solidFill>
           </a:ln>
-          <a:effectLst/>
           <a:effectLst>
             <a:outerShdw blurRad="90000" dist="38000" dir="5400000" rotWithShape="0">
               <a:srgbClr val="20242E">
@@ -32314,7 +32251,6 @@
               <a:srgbClr val="DC2626"/>
             </a:solidFill>
           </a:ln>
-          <a:effectLst/>
           <a:effectLst>
             <a:outerShdw blurRad="90000" dist="38000" dir="5400000" rotWithShape="0">
               <a:srgbClr val="20242E">
@@ -32536,7 +32472,6 @@
               <a:srgbClr val="DC2626"/>
             </a:solidFill>
           </a:ln>
-          <a:effectLst/>
           <a:effectLst>
             <a:outerShdw blurRad="90000" dist="38000" dir="5400000" rotWithShape="0">
               <a:srgbClr val="20242E">
@@ -32785,7 +32720,6 @@
               <a:srgbClr val="D64550"/>
             </a:solidFill>
           </a:ln>
-          <a:effectLst/>
           <a:effectLst>
             <a:outerShdw blurRad="90000" dist="38000" dir="5400000" rotWithShape="0">
               <a:srgbClr val="20242E">
